--- a/generated/Tier 1 Broker Scorecards/Ramandeep Kaur_Broker_Scorecard.pptx
+++ b/generated/Tier 1 Broker Scorecards/Ramandeep Kaur_Broker_Scorecard.pptx
@@ -3394,7 +3394,7 @@
                         <a:rPr sz="900">
                           <a:latin typeface="Segoe UI"/>
                         </a:rPr>
-                        <a:t>Tier 1  |  11.52% / 15.00%</a:t>
+                        <a:t>Tier 1  |  11.31% / 15.00%</a:t>
                       </a:r>
                     </a:p>
                   </a:txBody>
@@ -3766,7 +3766,7 @@
                         <a:rPr sz="900">
                           <a:latin typeface="Segoe UI"/>
                         </a:rPr>
-                        <a:t>Non-Fleet Subs: 143  |  Binds: 19</a:t>
+                        <a:t>Non-Fleet Subs: 146  |  Binds: 19</a:t>
                       </a:r>
                     </a:p>
                   </a:txBody>
@@ -4428,7 +4428,7 @@
                           </a:solidFill>
                           <a:latin typeface="Segoe UI"/>
                         </a:rPr>
-                        <a:t>29</a:t>
+                        <a:t>32</a:t>
                       </a:r>
                     </a:p>
                   </a:txBody>
@@ -4707,7 +4707,7 @@
                           </a:solidFill>
                           <a:latin typeface="Segoe UI"/>
                         </a:rPr>
-                        <a:t>6.9%</a:t>
+                        <a:t>6.2%</a:t>
                       </a:r>
                     </a:p>
                   </a:txBody>

--- a/generated/Tier 1 Broker Scorecards/Ramandeep Kaur_Broker_Scorecard.pptx
+++ b/generated/Tier 1 Broker Scorecards/Ramandeep Kaur_Broker_Scorecard.pptx
@@ -3394,7 +3394,7 @@
                         <a:rPr sz="900">
                           <a:latin typeface="Segoe UI"/>
                         </a:rPr>
-                        <a:t>Tier 1  |  11.31% / 15.00%</a:t>
+                        <a:t>Tier 1  |  11.76% / 15.00%</a:t>
                       </a:r>
                     </a:p>
                   </a:txBody>
@@ -3766,7 +3766,7 @@
                         <a:rPr sz="900">
                           <a:latin typeface="Segoe UI"/>
                         </a:rPr>
-                        <a:t>Non-Fleet Subs: 146  |  Binds: 19</a:t>
+                        <a:t>Non-Fleet Subs: 148  |  Binds: 20</a:t>
                       </a:r>
                     </a:p>
                   </a:txBody>
@@ -4428,7 +4428,7 @@
                           </a:solidFill>
                           <a:latin typeface="Segoe UI"/>
                         </a:rPr>
-                        <a:t>32</a:t>
+                        <a:t>34</a:t>
                       </a:r>
                     </a:p>
                   </a:txBody>
@@ -4465,7 +4465,7 @@
                         <a:rPr sz="800">
                           <a:latin typeface="Segoe UI"/>
                         </a:rPr>
-                        <a:t>26</a:t>
+                        <a:t>25</a:t>
                       </a:r>
                     </a:p>
                   </a:txBody>
@@ -4707,7 +4707,7 @@
                           </a:solidFill>
                           <a:latin typeface="Segoe UI"/>
                         </a:rPr>
-                        <a:t>6.2%</a:t>
+                        <a:t>5.9%</a:t>
                       </a:r>
                     </a:p>
                   </a:txBody>
@@ -4747,7 +4747,7 @@
                         <a:rPr sz="800">
                           <a:latin typeface="Segoe UI"/>
                         </a:rPr>
-                        <a:t>34.6%</a:t>
+                        <a:t>36.0%</a:t>
                       </a:r>
                     </a:p>
                   </a:txBody>

--- a/generated/Tier 1 Broker Scorecards/Ramandeep Kaur_Broker_Scorecard.pptx
+++ b/generated/Tier 1 Broker Scorecards/Ramandeep Kaur_Broker_Scorecard.pptx
@@ -3357,7 +3357,7 @@
                         <a:rPr sz="800">
                           <a:latin typeface="Segoe UI"/>
                         </a:rPr>
-                        <a:t>$1,552,939.09 / $1,373,656.74 / $394,142.17</a:t>
+                        <a:t>$1,552,939.09 / $1,374,906.12 / $395,391.55</a:t>
                       </a:r>
                     </a:p>
                   </a:txBody>
@@ -3394,7 +3394,7 @@
                         <a:rPr sz="900">
                           <a:latin typeface="Segoe UI"/>
                         </a:rPr>
-                        <a:t>Tier 1  |  11.76% / 15.00%</a:t>
+                        <a:t>Tier 1  |  12.35% / 15.00%</a:t>
                       </a:r>
                     </a:p>
                   </a:txBody>
@@ -3431,7 +3431,7 @@
                         <a:rPr sz="900">
                           <a:latin typeface="Segoe UI"/>
                         </a:rPr>
-                        <a:t>$2,174,114.73  (18.1% achieved)</a:t>
+                        <a:t>$2,174,114.73  (18.2% achieved)</a:t>
                       </a:r>
                     </a:p>
                   </a:txBody>
@@ -3653,7 +3653,7 @@
                         <a:rPr sz="900">
                           <a:latin typeface="Segoe UI"/>
                         </a:rPr>
-                        <a:t>Fleet Subs: 22  |  Binds: 0</a:t>
+                        <a:t>Fleet Subs: 22  |  Binds: 1</a:t>
                       </a:r>
                     </a:p>
                   </a:txBody>
@@ -3690,7 +3690,7 @@
                         <a:rPr sz="900">
                           <a:latin typeface="Segoe UI"/>
                         </a:rPr>
-                        <a:t>Fleet Bound Premium: $0.00</a:t>
+                        <a:t>Fleet Bound Premium: $31,349.63</a:t>
                       </a:r>
                     </a:p>
                   </a:txBody>
@@ -3727,7 +3727,7 @@
                         <a:rPr sz="900">
                           <a:latin typeface="Segoe UI"/>
                         </a:rPr>
-                        <a:t>Fleet Book %: 0.0%</a:t>
+                        <a:t>Fleet Book %: 7.9%</a:t>
                       </a:r>
                     </a:p>
                   </a:txBody>
@@ -3803,7 +3803,7 @@
                         <a:rPr sz="900">
                           <a:latin typeface="Segoe UI"/>
                         </a:rPr>
-                        <a:t>Non-Fleet Bound Premium: $394,142.17</a:t>
+                        <a:t>Non-Fleet Bound Premium: $364,041.92</a:t>
                       </a:r>
                     </a:p>
                   </a:txBody>
@@ -3840,7 +3840,7 @@
                         <a:rPr sz="900">
                           <a:latin typeface="Segoe UI"/>
                         </a:rPr>
-                        <a:t>Non-Fleet Book %: 100.0%</a:t>
+                        <a:t>Non-Fleet Book %: 92.1%</a:t>
                       </a:r>
                     </a:p>
                   </a:txBody>
@@ -4428,7 +4428,7 @@
                           </a:solidFill>
                           <a:latin typeface="Segoe UI"/>
                         </a:rPr>
-                        <a:t>34</a:t>
+                        <a:t>35</a:t>
                       </a:r>
                     </a:p>
                   </a:txBody>
@@ -4707,7 +4707,7 @@
                           </a:solidFill>
                           <a:latin typeface="Segoe UI"/>
                         </a:rPr>
-                        <a:t>5.9%</a:t>
+                        <a:t>11.4%</a:t>
                       </a:r>
                     </a:p>
                   </a:txBody>
@@ -4983,7 +4983,7 @@
                           </a:solidFill>
                           <a:latin typeface="Segoe UI"/>
                         </a:rPr>
-                        <a:t>2</a:t>
+                        <a:t>4</a:t>
                       </a:r>
                     </a:p>
                   </a:txBody>
@@ -5262,7 +5262,7 @@
                           </a:solidFill>
                           <a:latin typeface="Segoe UI"/>
                         </a:rPr>
-                        <a:t>$20.5K</a:t>
+                        <a:t>$21.7K</a:t>
                       </a:r>
                     </a:p>
                   </a:txBody>

--- a/generated/Tier 1 Broker Scorecards/Ramandeep Kaur_Broker_Scorecard.pptx
+++ b/generated/Tier 1 Broker Scorecards/Ramandeep Kaur_Broker_Scorecard.pptx
@@ -3394,7 +3394,7 @@
                         <a:rPr sz="900">
                           <a:latin typeface="Segoe UI"/>
                         </a:rPr>
-                        <a:t>Tier 1  |  12.35% / 15.00%</a:t>
+                        <a:t>Tier 1  |  12.87% / 15.00%</a:t>
                       </a:r>
                     </a:p>
                   </a:txBody>
@@ -3653,7 +3653,7 @@
                         <a:rPr sz="900">
                           <a:latin typeface="Segoe UI"/>
                         </a:rPr>
-                        <a:t>Fleet Subs: 22  |  Binds: 1</a:t>
+                        <a:t>Fleet Subs: 21  |  Binds: 1</a:t>
                       </a:r>
                     </a:p>
                   </a:txBody>
@@ -3690,7 +3690,7 @@
                         <a:rPr sz="900">
                           <a:latin typeface="Segoe UI"/>
                         </a:rPr>
-                        <a:t>Fleet Bound Premium: $31,349.63</a:t>
+                        <a:t>Fleet Bound Premium: $29,933.97</a:t>
                       </a:r>
                     </a:p>
                   </a:txBody>
@@ -3727,7 +3727,7 @@
                         <a:rPr sz="900">
                           <a:latin typeface="Segoe UI"/>
                         </a:rPr>
-                        <a:t>Fleet Book %: 7.9%</a:t>
+                        <a:t>Fleet Book %: 7.6%</a:t>
                       </a:r>
                     </a:p>
                   </a:txBody>
@@ -3766,7 +3766,7 @@
                         <a:rPr sz="900">
                           <a:latin typeface="Segoe UI"/>
                         </a:rPr>
-                        <a:t>Non-Fleet Subs: 148  |  Binds: 20</a:t>
+                        <a:t>Non-Fleet Subs: 150  |  Binds: 21</a:t>
                       </a:r>
                     </a:p>
                   </a:txBody>
@@ -3803,7 +3803,7 @@
                         <a:rPr sz="900">
                           <a:latin typeface="Segoe UI"/>
                         </a:rPr>
-                        <a:t>Non-Fleet Bound Premium: $364,041.92</a:t>
+                        <a:t>Non-Fleet Bound Premium: $365,457.58</a:t>
                       </a:r>
                     </a:p>
                   </a:txBody>
@@ -3840,7 +3840,7 @@
                         <a:rPr sz="900">
                           <a:latin typeface="Segoe UI"/>
                         </a:rPr>
-                        <a:t>Non-Fleet Book %: 92.1%</a:t>
+                        <a:t>Non-Fleet Book %: 92.4%</a:t>
                       </a:r>
                     </a:p>
                   </a:txBody>
@@ -4428,7 +4428,7 @@
                           </a:solidFill>
                           <a:latin typeface="Segoe UI"/>
                         </a:rPr>
-                        <a:t>35</a:t>
+                        <a:t>36</a:t>
                       </a:r>
                     </a:p>
                   </a:txBody>
@@ -4465,7 +4465,7 @@
                         <a:rPr sz="800">
                           <a:latin typeface="Segoe UI"/>
                         </a:rPr>
-                        <a:t>25</a:t>
+                        <a:t>26</a:t>
                       </a:r>
                     </a:p>
                   </a:txBody>
@@ -4707,7 +4707,7 @@
                           </a:solidFill>
                           <a:latin typeface="Segoe UI"/>
                         </a:rPr>
-                        <a:t>11.4%</a:t>
+                        <a:t>11.1%</a:t>
                       </a:r>
                     </a:p>
                   </a:txBody>
@@ -4747,7 +4747,7 @@
                         <a:rPr sz="800">
                           <a:latin typeface="Segoe UI"/>
                         </a:rPr>
-                        <a:t>36.0%</a:t>
+                        <a:t>34.6%</a:t>
                       </a:r>
                     </a:p>
                   </a:txBody>

--- a/generated/Tier 1 Broker Scorecards/Ramandeep Kaur_Broker_Scorecard.pptx
+++ b/generated/Tier 1 Broker Scorecards/Ramandeep Kaur_Broker_Scorecard.pptx
@@ -3394,7 +3394,7 @@
                         <a:rPr sz="900">
                           <a:latin typeface="Segoe UI"/>
                         </a:rPr>
-                        <a:t>Tier 1  |  12.87% / 15.00%</a:t>
+                        <a:t>Tier 1  |  12.14% / 15.00%</a:t>
                       </a:r>
                     </a:p>
                   </a:txBody>
@@ -3690,7 +3690,7 @@
                         <a:rPr sz="900">
                           <a:latin typeface="Segoe UI"/>
                         </a:rPr>
-                        <a:t>Fleet Bound Premium: $29,933.97</a:t>
+                        <a:t>Fleet Bound Premium: $31,250.68</a:t>
                       </a:r>
                     </a:p>
                   </a:txBody>
@@ -3727,7 +3727,7 @@
                         <a:rPr sz="900">
                           <a:latin typeface="Segoe UI"/>
                         </a:rPr>
-                        <a:t>Fleet Book %: 7.6%</a:t>
+                        <a:t>Fleet Book %: 7.9%</a:t>
                       </a:r>
                     </a:p>
                   </a:txBody>
@@ -3766,7 +3766,7 @@
                         <a:rPr sz="900">
                           <a:latin typeface="Segoe UI"/>
                         </a:rPr>
-                        <a:t>Non-Fleet Subs: 150  |  Binds: 21</a:t>
+                        <a:t>Non-Fleet Subs: 152  |  Binds: 20</a:t>
                       </a:r>
                     </a:p>
                   </a:txBody>
@@ -3803,7 +3803,7 @@
                         <a:rPr sz="900">
                           <a:latin typeface="Segoe UI"/>
                         </a:rPr>
-                        <a:t>Non-Fleet Bound Premium: $365,457.58</a:t>
+                        <a:t>Non-Fleet Bound Premium: $364,140.87</a:t>
                       </a:r>
                     </a:p>
                   </a:txBody>
@@ -3840,7 +3840,7 @@
                         <a:rPr sz="900">
                           <a:latin typeface="Segoe UI"/>
                         </a:rPr>
-                        <a:t>Non-Fleet Book %: 92.4%</a:t>
+                        <a:t>Non-Fleet Book %: 92.1%</a:t>
                       </a:r>
                     </a:p>
                   </a:txBody>
@@ -4428,7 +4428,7 @@
                           </a:solidFill>
                           <a:latin typeface="Segoe UI"/>
                         </a:rPr>
-                        <a:t>36</a:t>
+                        <a:t>38</a:t>
                       </a:r>
                     </a:p>
                   </a:txBody>
@@ -4707,7 +4707,7 @@
                           </a:solidFill>
                           <a:latin typeface="Segoe UI"/>
                         </a:rPr>
-                        <a:t>11.1%</a:t>
+                        <a:t>7.9%</a:t>
                       </a:r>
                     </a:p>
                   </a:txBody>
@@ -4983,7 +4983,7 @@
                           </a:solidFill>
                           <a:latin typeface="Segoe UI"/>
                         </a:rPr>
-                        <a:t>4</a:t>
+                        <a:t>3</a:t>
                       </a:r>
                     </a:p>
                   </a:txBody>

--- a/generated/Tier 1 Broker Scorecards/Ramandeep Kaur_Broker_Scorecard.pptx
+++ b/generated/Tier 1 Broker Scorecards/Ramandeep Kaur_Broker_Scorecard.pptx
@@ -3394,7 +3394,7 @@
                         <a:rPr sz="900">
                           <a:latin typeface="Segoe UI"/>
                         </a:rPr>
-                        <a:t>Tier 1  |  12.14% / 15.00%</a:t>
+                        <a:t>Tier 1  |  12.07% / 15.00%</a:t>
                       </a:r>
                     </a:p>
                   </a:txBody>
@@ -3690,7 +3690,7 @@
                         <a:rPr sz="900">
                           <a:latin typeface="Segoe UI"/>
                         </a:rPr>
-                        <a:t>Fleet Bound Premium: $31,250.68</a:t>
+                        <a:t>Fleet Bound Premium: $31,264.82</a:t>
                       </a:r>
                     </a:p>
                   </a:txBody>
@@ -3766,7 +3766,7 @@
                         <a:rPr sz="900">
                           <a:latin typeface="Segoe UI"/>
                         </a:rPr>
-                        <a:t>Non-Fleet Subs: 152  |  Binds: 20</a:t>
+                        <a:t>Non-Fleet Subs: 153  |  Binds: 20</a:t>
                       </a:r>
                     </a:p>
                   </a:txBody>
@@ -3803,7 +3803,7 @@
                         <a:rPr sz="900">
                           <a:latin typeface="Segoe UI"/>
                         </a:rPr>
-                        <a:t>Non-Fleet Bound Premium: $364,140.87</a:t>
+                        <a:t>Non-Fleet Bound Premium: $364,126.73</a:t>
                       </a:r>
                     </a:p>
                   </a:txBody>
@@ -4428,7 +4428,7 @@
                           </a:solidFill>
                           <a:latin typeface="Segoe UI"/>
                         </a:rPr>
-                        <a:t>38</a:t>
+                        <a:t>39</a:t>
                       </a:r>
                     </a:p>
                   </a:txBody>
@@ -4465,7 +4465,7 @@
                         <a:rPr sz="800">
                           <a:latin typeface="Segoe UI"/>
                         </a:rPr>
-                        <a:t>26</a:t>
+                        <a:t>25</a:t>
                       </a:r>
                     </a:p>
                   </a:txBody>
@@ -4707,7 +4707,7 @@
                           </a:solidFill>
                           <a:latin typeface="Segoe UI"/>
                         </a:rPr>
-                        <a:t>7.9%</a:t>
+                        <a:t>7.7%</a:t>
                       </a:r>
                     </a:p>
                   </a:txBody>
@@ -4747,7 +4747,7 @@
                         <a:rPr sz="800">
                           <a:latin typeface="Segoe UI"/>
                         </a:rPr>
-                        <a:t>34.6%</a:t>
+                        <a:t>36.0%</a:t>
                       </a:r>
                     </a:p>
                   </a:txBody>

--- a/generated/Tier 1 Broker Scorecards/Ramandeep Kaur_Broker_Scorecard.pptx
+++ b/generated/Tier 1 Broker Scorecards/Ramandeep Kaur_Broker_Scorecard.pptx
@@ -3690,7 +3690,7 @@
                         <a:rPr sz="900">
                           <a:latin typeface="Segoe UI"/>
                         </a:rPr>
-                        <a:t>Fleet Bound Premium: $31,264.82</a:t>
+                        <a:t>Fleet Bound Premium: $31,250.68</a:t>
                       </a:r>
                     </a:p>
                   </a:txBody>
@@ -3803,7 +3803,7 @@
                         <a:rPr sz="900">
                           <a:latin typeface="Segoe UI"/>
                         </a:rPr>
-                        <a:t>Non-Fleet Bound Premium: $364,126.73</a:t>
+                        <a:t>Non-Fleet Bound Premium: $364,140.87</a:t>
                       </a:r>
                     </a:p>
                   </a:txBody>

--- a/generated/Tier 1 Broker Scorecards/Ramandeep Kaur_Broker_Scorecard.pptx
+++ b/generated/Tier 1 Broker Scorecards/Ramandeep Kaur_Broker_Scorecard.pptx
@@ -3394,7 +3394,7 @@
                         <a:rPr sz="900">
                           <a:latin typeface="Segoe UI"/>
                         </a:rPr>
-                        <a:t>Tier 1  |  12.07% / 15.00%</a:t>
+                        <a:t>Tier 1  |  12.00% / 15.00%</a:t>
                       </a:r>
                     </a:p>
                   </a:txBody>
@@ -3690,7 +3690,7 @@
                         <a:rPr sz="900">
                           <a:latin typeface="Segoe UI"/>
                         </a:rPr>
-                        <a:t>Fleet Bound Premium: $31,250.68</a:t>
+                        <a:t>Fleet Bound Premium: $31,275.63</a:t>
                       </a:r>
                     </a:p>
                   </a:txBody>
@@ -3766,7 +3766,7 @@
                         <a:rPr sz="900">
                           <a:latin typeface="Segoe UI"/>
                         </a:rPr>
-                        <a:t>Non-Fleet Subs: 153  |  Binds: 20</a:t>
+                        <a:t>Non-Fleet Subs: 154  |  Binds: 20</a:t>
                       </a:r>
                     </a:p>
                   </a:txBody>
@@ -3803,7 +3803,7 @@
                         <a:rPr sz="900">
                           <a:latin typeface="Segoe UI"/>
                         </a:rPr>
-                        <a:t>Non-Fleet Bound Premium: $364,140.87</a:t>
+                        <a:t>Non-Fleet Bound Premium: $364,115.92</a:t>
                       </a:r>
                     </a:p>
                   </a:txBody>
@@ -4428,7 +4428,7 @@
                           </a:solidFill>
                           <a:latin typeface="Segoe UI"/>
                         </a:rPr>
-                        <a:t>39</a:t>
+                        <a:t>40</a:t>
                       </a:r>
                     </a:p>
                   </a:txBody>
@@ -4465,7 +4465,7 @@
                         <a:rPr sz="800">
                           <a:latin typeface="Segoe UI"/>
                         </a:rPr>
-                        <a:t>25</a:t>
+                        <a:t>26</a:t>
                       </a:r>
                     </a:p>
                   </a:txBody>
@@ -4707,7 +4707,7 @@
                           </a:solidFill>
                           <a:latin typeface="Segoe UI"/>
                         </a:rPr>
-                        <a:t>7.7%</a:t>
+                        <a:t>7.5%</a:t>
                       </a:r>
                     </a:p>
                   </a:txBody>
@@ -4747,7 +4747,7 @@
                         <a:rPr sz="800">
                           <a:latin typeface="Segoe UI"/>
                         </a:rPr>
-                        <a:t>36.0%</a:t>
+                        <a:t>34.6%</a:t>
                       </a:r>
                     </a:p>
                   </a:txBody>

--- a/generated/Tier 1 Broker Scorecards/Ramandeep Kaur_Broker_Scorecard.pptx
+++ b/generated/Tier 1 Broker Scorecards/Ramandeep Kaur_Broker_Scorecard.pptx
@@ -3357,7 +3357,7 @@
                         <a:rPr sz="800">
                           <a:latin typeface="Segoe UI"/>
                         </a:rPr>
-                        <a:t>$1,552,939.09 / $1,374,906.12 / $395,391.55</a:t>
+                        <a:t>$1,552,939.09 / $1,374,919.90 / $395,405.33</a:t>
                       </a:r>
                     </a:p>
                   </a:txBody>
@@ -3394,7 +3394,7 @@
                         <a:rPr sz="900">
                           <a:latin typeface="Segoe UI"/>
                         </a:rPr>
-                        <a:t>Tier 1  |  12.00% / 15.00%</a:t>
+                        <a:t>Tier 1  |  12.99% / 15.00%</a:t>
                       </a:r>
                     </a:p>
                   </a:txBody>
@@ -3653,7 +3653,7 @@
                         <a:rPr sz="900">
                           <a:latin typeface="Segoe UI"/>
                         </a:rPr>
-                        <a:t>Fleet Subs: 21  |  Binds: 1</a:t>
+                        <a:t>Fleet Subs: 21  |  Binds: 2</a:t>
                       </a:r>
                     </a:p>
                   </a:txBody>
@@ -3690,7 +3690,7 @@
                         <a:rPr sz="900">
                           <a:latin typeface="Segoe UI"/>
                         </a:rPr>
-                        <a:t>Fleet Bound Premium: $31,275.63</a:t>
+                        <a:t>Fleet Bound Premium: $86,609.25</a:t>
                       </a:r>
                     </a:p>
                   </a:txBody>
@@ -3727,7 +3727,7 @@
                         <a:rPr sz="900">
                           <a:latin typeface="Segoe UI"/>
                         </a:rPr>
-                        <a:t>Fleet Book %: 7.9%</a:t>
+                        <a:t>Fleet Book %: 21.9%</a:t>
                       </a:r>
                     </a:p>
                   </a:txBody>
@@ -3766,7 +3766,7 @@
                         <a:rPr sz="900">
                           <a:latin typeface="Segoe UI"/>
                         </a:rPr>
-                        <a:t>Non-Fleet Subs: 154  |  Binds: 20</a:t>
+                        <a:t>Non-Fleet Subs: 156  |  Binds: 21</a:t>
                       </a:r>
                     </a:p>
                   </a:txBody>
@@ -3803,7 +3803,7 @@
                         <a:rPr sz="900">
                           <a:latin typeface="Segoe UI"/>
                         </a:rPr>
-                        <a:t>Non-Fleet Bound Premium: $364,115.92</a:t>
+                        <a:t>Non-Fleet Bound Premium: $308,796.08</a:t>
                       </a:r>
                     </a:p>
                   </a:txBody>
@@ -3840,7 +3840,7 @@
                         <a:rPr sz="900">
                           <a:latin typeface="Segoe UI"/>
                         </a:rPr>
-                        <a:t>Non-Fleet Book %: 92.1%</a:t>
+                        <a:t>Non-Fleet Book %: 78.1%</a:t>
                       </a:r>
                     </a:p>
                   </a:txBody>
@@ -4424,11 +4424,11 @@
                       <a:r>
                         <a:rPr sz="800">
                           <a:solidFill>
-                            <a:srgbClr val="DC2626"/>
+                            <a:srgbClr val="059669"/>
                           </a:solidFill>
                           <a:latin typeface="Segoe UI"/>
                         </a:rPr>
-                        <a:t>40</a:t>
+                        <a:t>42</a:t>
                       </a:r>
                     </a:p>
                   </a:txBody>
@@ -4465,7 +4465,7 @@
                         <a:rPr sz="800">
                           <a:latin typeface="Segoe UI"/>
                         </a:rPr>
-                        <a:t>26</a:t>
+                        <a:t>25</a:t>
                       </a:r>
                     </a:p>
                   </a:txBody>
@@ -4707,7 +4707,7 @@
                           </a:solidFill>
                           <a:latin typeface="Segoe UI"/>
                         </a:rPr>
-                        <a:t>7.5%</a:t>
+                        <a:t>9.5%</a:t>
                       </a:r>
                     </a:p>
                   </a:txBody>
@@ -4747,7 +4747,7 @@
                         <a:rPr sz="800">
                           <a:latin typeface="Segoe UI"/>
                         </a:rPr>
-                        <a:t>34.6%</a:t>
+                        <a:t>36.0%</a:t>
                       </a:r>
                     </a:p>
                   </a:txBody>
@@ -4983,7 +4983,7 @@
                           </a:solidFill>
                           <a:latin typeface="Segoe UI"/>
                         </a:rPr>
-                        <a:t>3</a:t>
+                        <a:t>4</a:t>
                       </a:r>
                     </a:p>
                   </a:txBody>

--- a/generated/Tier 1 Broker Scorecards/Ramandeep Kaur_Broker_Scorecard.pptx
+++ b/generated/Tier 1 Broker Scorecards/Ramandeep Kaur_Broker_Scorecard.pptx
@@ -3394,7 +3394,7 @@
                         <a:rPr sz="900">
                           <a:latin typeface="Segoe UI"/>
                         </a:rPr>
-                        <a:t>Tier 1  |  12.99% / 15.00%</a:t>
+                        <a:t>Tier 1  |  12.29% / 15.00%</a:t>
                       </a:r>
                     </a:p>
                   </a:txBody>
@@ -3690,7 +3690,7 @@
                         <a:rPr sz="900">
                           <a:latin typeface="Segoe UI"/>
                         </a:rPr>
-                        <a:t>Fleet Bound Premium: $86,609.25</a:t>
+                        <a:t>Fleet Bound Premium: $87,258.55</a:t>
                       </a:r>
                     </a:p>
                   </a:txBody>
@@ -3727,7 +3727,7 @@
                         <a:rPr sz="900">
                           <a:latin typeface="Segoe UI"/>
                         </a:rPr>
-                        <a:t>Fleet Book %: 21.9%</a:t>
+                        <a:t>Fleet Book %: 22.1%</a:t>
                       </a:r>
                     </a:p>
                   </a:txBody>
@@ -3766,7 +3766,7 @@
                         <a:rPr sz="900">
                           <a:latin typeface="Segoe UI"/>
                         </a:rPr>
-                        <a:t>Non-Fleet Subs: 156  |  Binds: 21</a:t>
+                        <a:t>Non-Fleet Subs: 158  |  Binds: 20</a:t>
                       </a:r>
                     </a:p>
                   </a:txBody>
@@ -3803,7 +3803,7 @@
                         <a:rPr sz="900">
                           <a:latin typeface="Segoe UI"/>
                         </a:rPr>
-                        <a:t>Non-Fleet Bound Premium: $308,796.08</a:t>
+                        <a:t>Non-Fleet Bound Premium: $308,146.78</a:t>
                       </a:r>
                     </a:p>
                   </a:txBody>
@@ -3840,7 +3840,7 @@
                         <a:rPr sz="900">
                           <a:latin typeface="Segoe UI"/>
                         </a:rPr>
-                        <a:t>Non-Fleet Book %: 78.1%</a:t>
+                        <a:t>Non-Fleet Book %: 77.9%</a:t>
                       </a:r>
                     </a:p>
                   </a:txBody>
@@ -4428,7 +4428,7 @@
                           </a:solidFill>
                           <a:latin typeface="Segoe UI"/>
                         </a:rPr>
-                        <a:t>42</a:t>
+                        <a:t>44</a:t>
                       </a:r>
                     </a:p>
                   </a:txBody>
@@ -4707,7 +4707,7 @@
                           </a:solidFill>
                           <a:latin typeface="Segoe UI"/>
                         </a:rPr>
-                        <a:t>9.5%</a:t>
+                        <a:t>6.8%</a:t>
                       </a:r>
                     </a:p>
                   </a:txBody>
@@ -4983,7 +4983,7 @@
                           </a:solidFill>
                           <a:latin typeface="Segoe UI"/>
                         </a:rPr>
-                        <a:t>4</a:t>
+                        <a:t>3</a:t>
                       </a:r>
                     </a:p>
                   </a:txBody>

--- a/generated/Tier 1 Broker Scorecards/Ramandeep Kaur_Broker_Scorecard.pptx
+++ b/generated/Tier 1 Broker Scorecards/Ramandeep Kaur_Broker_Scorecard.pptx
@@ -3357,7 +3357,7 @@
                         <a:rPr sz="800">
                           <a:latin typeface="Segoe UI"/>
                         </a:rPr>
-                        <a:t>$1,552,939.09 / $1,374,919.90 / $395,405.33</a:t>
+                        <a:t>$1,552,939.09 / $1,390,204.22 / $410,689.65</a:t>
                       </a:r>
                     </a:p>
                   </a:txBody>
@@ -3394,7 +3394,7 @@
                         <a:rPr sz="900">
                           <a:latin typeface="Segoe UI"/>
                         </a:rPr>
-                        <a:t>Tier 1  |  12.29% / 15.00%</a:t>
+                        <a:t>Tier 1  |  12.22% / 15.00%</a:t>
                       </a:r>
                     </a:p>
                   </a:txBody>
@@ -3431,7 +3431,7 @@
                         <a:rPr sz="900">
                           <a:latin typeface="Segoe UI"/>
                         </a:rPr>
-                        <a:t>$2,174,114.73  (18.2% achieved)</a:t>
+                        <a:t>$2,174,114.73  (18.9% achieved)</a:t>
                       </a:r>
                     </a:p>
                   </a:txBody>
@@ -3653,7 +3653,7 @@
                         <a:rPr sz="900">
                           <a:latin typeface="Segoe UI"/>
                         </a:rPr>
-                        <a:t>Fleet Subs: 21  |  Binds: 2</a:t>
+                        <a:t>Fleet Subs: 21  |  Binds: 1</a:t>
                       </a:r>
                     </a:p>
                   </a:txBody>
@@ -3690,7 +3690,7 @@
                         <a:rPr sz="900">
                           <a:latin typeface="Segoe UI"/>
                         </a:rPr>
-                        <a:t>Fleet Bound Premium: $87,258.55</a:t>
+                        <a:t>Fleet Bound Premium: $66,831.75</a:t>
                       </a:r>
                     </a:p>
                   </a:txBody>
@@ -3727,7 +3727,7 @@
                         <a:rPr sz="900">
                           <a:latin typeface="Segoe UI"/>
                         </a:rPr>
-                        <a:t>Fleet Book %: 22.1%</a:t>
+                        <a:t>Fleet Book %: 16.3%</a:t>
                       </a:r>
                     </a:p>
                   </a:txBody>
@@ -3766,7 +3766,7 @@
                         <a:rPr sz="900">
                           <a:latin typeface="Segoe UI"/>
                         </a:rPr>
-                        <a:t>Non-Fleet Subs: 158  |  Binds: 20</a:t>
+                        <a:t>Non-Fleet Subs: 159  |  Binds: 21</a:t>
                       </a:r>
                     </a:p>
                   </a:txBody>
@@ -3803,7 +3803,7 @@
                         <a:rPr sz="900">
                           <a:latin typeface="Segoe UI"/>
                         </a:rPr>
-                        <a:t>Non-Fleet Bound Premium: $308,146.78</a:t>
+                        <a:t>Non-Fleet Bound Premium: $343,857.90</a:t>
                       </a:r>
                     </a:p>
                   </a:txBody>
@@ -3840,7 +3840,7 @@
                         <a:rPr sz="900">
                           <a:latin typeface="Segoe UI"/>
                         </a:rPr>
-                        <a:t>Non-Fleet Book %: 77.9%</a:t>
+                        <a:t>Non-Fleet Book %: 83.7%</a:t>
                       </a:r>
                     </a:p>
                   </a:txBody>
@@ -4428,7 +4428,7 @@
                           </a:solidFill>
                           <a:latin typeface="Segoe UI"/>
                         </a:rPr>
-                        <a:t>44</a:t>
+                        <a:t>45</a:t>
                       </a:r>
                     </a:p>
                   </a:txBody>
@@ -4624,7 +4624,7 @@
                           </a:solidFill>
                           <a:latin typeface="Segoe UI"/>
                         </a:rPr>
-                        <a:t>19.6%</a:t>
+                        <a:t>21.7%</a:t>
                       </a:r>
                     </a:p>
                   </a:txBody>
@@ -4707,7 +4707,7 @@
                           </a:solidFill>
                           <a:latin typeface="Segoe UI"/>
                         </a:rPr>
-                        <a:t>6.8%</a:t>
+                        <a:t>4.4%</a:t>
                       </a:r>
                     </a:p>
                   </a:txBody>
@@ -4901,12 +4901,9 @@
                       <a:pPr algn="ctr"/>
                       <a:r>
                         <a:rPr sz="800">
-                          <a:solidFill>
-                            <a:srgbClr val="DC2626"/>
-                          </a:solidFill>
                           <a:latin typeface="Segoe UI"/>
                         </a:rPr>
-                        <a:t>9</a:t>
+                        <a:t>10</a:t>
                       </a:r>
                     </a:p>
                   </a:txBody>
@@ -4983,7 +4980,7 @@
                           </a:solidFill>
                           <a:latin typeface="Segoe UI"/>
                         </a:rPr>
-                        <a:t>3</a:t>
+                        <a:t>2</a:t>
                       </a:r>
                     </a:p>
                   </a:txBody>
@@ -5258,11 +5255,11 @@
                       <a:r>
                         <a:rPr sz="800" b="1">
                           <a:solidFill>
-                            <a:srgbClr val="DC2626"/>
+                            <a:srgbClr val="059669"/>
                           </a:solidFill>
                           <a:latin typeface="Segoe UI"/>
                         </a:rPr>
-                        <a:t>$21.7K</a:t>
+                        <a:t>$37.0K</a:t>
                       </a:r>
                     </a:p>
                   </a:txBody>

--- a/generated/Tier 1 Broker Scorecards/Ramandeep Kaur_Broker_Scorecard.pptx
+++ b/generated/Tier 1 Broker Scorecards/Ramandeep Kaur_Broker_Scorecard.pptx
@@ -3690,7 +3690,7 @@
                         <a:rPr sz="900">
                           <a:latin typeface="Segoe UI"/>
                         </a:rPr>
-                        <a:t>Fleet Bound Premium: $66,831.75</a:t>
+                        <a:t>Fleet Bound Premium: $66,786.97</a:t>
                       </a:r>
                     </a:p>
                   </a:txBody>
@@ -3803,7 +3803,7 @@
                         <a:rPr sz="900">
                           <a:latin typeface="Segoe UI"/>
                         </a:rPr>
-                        <a:t>Non-Fleet Bound Premium: $343,857.90</a:t>
+                        <a:t>Non-Fleet Bound Premium: $343,902.68</a:t>
                       </a:r>
                     </a:p>
                   </a:txBody>
@@ -4465,7 +4465,7 @@
                         <a:rPr sz="800">
                           <a:latin typeface="Segoe UI"/>
                         </a:rPr>
-                        <a:t>25</a:t>
+                        <a:t>26</a:t>
                       </a:r>
                     </a:p>
                   </a:txBody>
@@ -4747,7 +4747,7 @@
                         <a:rPr sz="800">
                           <a:latin typeface="Segoe UI"/>
                         </a:rPr>
-                        <a:t>36.0%</a:t>
+                        <a:t>34.6%</a:t>
                       </a:r>
                     </a:p>
                   </a:txBody>

--- a/generated/Tier 1 Broker Scorecards/Ramandeep Kaur_Broker_Scorecard.pptx
+++ b/generated/Tier 1 Broker Scorecards/Ramandeep Kaur_Broker_Scorecard.pptx
@@ -3357,7 +3357,7 @@
                         <a:rPr sz="800">
                           <a:latin typeface="Segoe UI"/>
                         </a:rPr>
-                        <a:t>$1,552,939.09 / $1,390,204.22 / $410,689.65</a:t>
+                        <a:t>$1,552,939.09 / $1,361,434.07 / $410,689.65</a:t>
                       </a:r>
                     </a:p>
                   </a:txBody>
@@ -3690,7 +3690,7 @@
                         <a:rPr sz="900">
                           <a:latin typeface="Segoe UI"/>
                         </a:rPr>
-                        <a:t>Fleet Bound Premium: $66,786.97</a:t>
+                        <a:t>Fleet Bound Premium: $66,812.35</a:t>
                       </a:r>
                     </a:p>
                   </a:txBody>
@@ -3803,7 +3803,7 @@
                         <a:rPr sz="900">
                           <a:latin typeface="Segoe UI"/>
                         </a:rPr>
-                        <a:t>Non-Fleet Bound Premium: $343,902.68</a:t>
+                        <a:t>Non-Fleet Bound Premium: $343,877.30</a:t>
                       </a:r>
                     </a:p>
                   </a:txBody>
@@ -4465,7 +4465,7 @@
                         <a:rPr sz="800">
                           <a:latin typeface="Segoe UI"/>
                         </a:rPr>
-                        <a:t>26</a:t>
+                        <a:t>25</a:t>
                       </a:r>
                     </a:p>
                   </a:txBody>
@@ -4747,7 +4747,7 @@
                         <a:rPr sz="800">
                           <a:latin typeface="Segoe UI"/>
                         </a:rPr>
-                        <a:t>34.6%</a:t>
+                        <a:t>36.0%</a:t>
                       </a:r>
                     </a:p>
                   </a:txBody>
